--- a/dist/초4/수학/수와연산/초4_수학_수와연산_02_억과조.pptx
+++ b/dist/초4/수학/수와연산/초4_수학_수와연산_02_억과조.pptx
@@ -122,13 +122,13 @@
   <p:extLst>
     <p:ext uri="{521415D9-36F7-43E2-AB2F-B90AF26B5E84}">
       <p14:sectionLst xmlns:p14="http://schemas.microsoft.com/office/powerpoint/2010/main">
-        <p14:section name="도입" id="{dc53dc99-d2db-7339-255e-e87ba4adbc07}">
+        <p14:section name="도입" id="{fc75b554-57c9-f687-a2fa-7384c39e6229}">
           <p14:sldIdLst>
             <p14:sldId id="256"/>
             <p14:sldId id="257"/>
           </p14:sldIdLst>
         </p14:section>
-        <p14:section name="개념" id="{514047e0-55cf-7061-3507-e16a04598535}">
+        <p14:section name="개념" id="{1b7ae588-94fc-18bd-9538-9f350221461b}">
           <p14:sldIdLst>
             <p14:sldId id="258"/>
             <p14:sldId id="259"/>
@@ -138,32 +138,32 @@
             <p14:sldId id="265"/>
           </p14:sldIdLst>
         </p14:section>
-        <p14:section name="연습" id="{0b1d868b-acfa-499c-9e1b-4c0b8ff81b1f}">
+        <p14:section name="연습" id="{1bb44732-edf7-d855-cfa8-1ec869192c8a}">
           <p14:sldIdLst>
             <p14:sldId id="262"/>
             <p14:sldId id="263"/>
             <p14:sldId id="266"/>
           </p14:sldIdLst>
         </p14:section>
-        <p14:section name="개념" id="{6ef6cb0d-01b3-0c3c-7c57-8dd0aae051e7}">
+        <p14:section name="개념" id="{514fb268-3e1d-afe2-b4d6-b12f86b856a2}">
           <p14:sldIdLst/>
         </p14:section>
-        <p14:section name="연습" id="{91111402-7876-01e8-6cac-993d90af8811}">
+        <p14:section name="연습" id="{effe9eff-94de-b518-ae3e-5cb8b1bff6aa}">
           <p14:sldIdLst/>
         </p14:section>
-        <p14:section name="확인" id="{4ac6c7ac-0645-9d77-cff8-a0b0427bdf08}">
+        <p14:section name="확인" id="{84c978d3-2776-64c7-abb8-77317c38fc5d}">
           <p14:sldIdLst>
             <p14:sldId id="267"/>
             <p14:sldId id="268"/>
             <p14:sldId id="269"/>
           </p14:sldIdLst>
         </p14:section>
-        <p14:section name="정리" id="{b3904a9f-1f0f-b776-2830-a00efde72f12}">
+        <p14:section name="정리" id="{1635059d-412f-ec9e-9514-dc2f90ea1bbc}">
           <p14:sldIdLst>
             <p14:sldId id="270"/>
           </p14:sldIdLst>
         </p14:section>
-        <p14:section name="보충" id="{de154510-7199-53b4-e195-43ca7f313acd}">
+        <p14:section name="보충" id="{5ff07921-ddc3-7cb1-fd1f-4e118d2bed8d}">
           <p14:sldIdLst>
             <p14:sldId id="271"/>
           </p14:sldIdLst>
@@ -3567,7 +3567,7 @@
           </p:nvPr>
         </p:nvGraphicFramePr>
         <p:xfrm>
-          <a:off x="1522476" y="2143760"/>
+          <a:off x="1522476" y="2188210"/>
           <a:ext cx="9144000" cy="914400"/>
         </p:xfrm>
         <a:graphic>
@@ -3578,7 +3578,7 @@
                 <a:gridCol w="2286000"/>
                 <a:gridCol w="6858000"/>
               </a:tblGrid>
-              <a:tr h="568960">
+              <a:tr h="551180">
                 <a:tc>
                   <a:txBody>
                     <a:bodyPr/>
@@ -3716,7 +3716,7 @@
                   </a:tcPr>
                 </a:tc>
               </a:tr>
-              <a:tr h="568960">
+              <a:tr h="551180">
                 <a:tc>
                   <a:txBody>
                     <a:bodyPr/>
@@ -3854,7 +3854,7 @@
                   </a:tcPr>
                 </a:tc>
               </a:tr>
-              <a:tr h="568960">
+              <a:tr h="551180">
                 <a:tc>
                   <a:txBody>
                     <a:bodyPr/>
@@ -3992,7 +3992,7 @@
                   </a:tcPr>
                 </a:tc>
               </a:tr>
-              <a:tr h="568960">
+              <a:tr h="551180">
                 <a:tc>
                   <a:txBody>
                     <a:bodyPr/>
@@ -4130,7 +4130,7 @@
                   </a:tcPr>
                 </a:tc>
               </a:tr>
-              <a:tr h="568960">
+              <a:tr h="551180">
                 <a:tc>
                   <a:txBody>
                     <a:bodyPr/>
@@ -5804,7 +5804,7 @@
               <a:buNone/>
             </a:pPr>
             <a:r>
-              <a:rPr lang="ko-KR" altLang="en-US" sz="3000" dirty="0">
+              <a:rPr lang="en-US" altLang="ko-KR" sz="3000" dirty="0">
                 <a:solidFill>
                   <a:srgbClr val="1F2937"/>
                 </a:solidFill>
@@ -7449,7 +7449,7 @@
           </p:nvPr>
         </p:nvGraphicFramePr>
         <p:xfrm>
-          <a:off x="2208276" y="2526030"/>
+          <a:off x="2208276" y="2552700"/>
           <a:ext cx="7772400" cy="914400"/>
         </p:xfrm>
         <a:graphic>
@@ -7463,7 +7463,7 @@
                 <a:gridCol w="1554480"/>
                 <a:gridCol w="1554480"/>
               </a:tblGrid>
-              <a:tr h="568960">
+              <a:tr h="551180">
                 <a:tc>
                   <a:txBody>
                     <a:bodyPr/>
@@ -7805,7 +7805,7 @@
                   </a:tcPr>
                 </a:tc>
               </a:tr>
-              <a:tr h="568960">
+              <a:tr h="551180">
                 <a:tc>
                   <a:txBody>
                     <a:bodyPr/>
@@ -8147,7 +8147,7 @@
                   </a:tcPr>
                 </a:tc>
               </a:tr>
-              <a:tr h="568960">
+              <a:tr h="551180">
                 <a:tc>
                   <a:txBody>
                     <a:bodyPr/>
@@ -9102,7 +9102,7 @@
           </p:nvPr>
         </p:nvGraphicFramePr>
         <p:xfrm>
-          <a:off x="1979676" y="2346960"/>
+          <a:off x="1979676" y="2385060"/>
           <a:ext cx="8229600" cy="914400"/>
         </p:xfrm>
         <a:graphic>
@@ -9114,7 +9114,7 @@
                 <a:gridCol w="2743200"/>
                 <a:gridCol w="2743200"/>
               </a:tblGrid>
-              <a:tr h="609600">
+              <a:tr h="590550">
                 <a:tc>
                   <a:txBody>
                     <a:bodyPr/>
@@ -9320,7 +9320,7 @@
                   </a:tcPr>
                 </a:tc>
               </a:tr>
-              <a:tr h="609600">
+              <a:tr h="590550">
                 <a:tc>
                   <a:txBody>
                     <a:bodyPr/>
@@ -9526,7 +9526,7 @@
                   </a:tcPr>
                 </a:tc>
               </a:tr>
-              <a:tr h="609600">
+              <a:tr h="590550">
                 <a:tc>
                   <a:txBody>
                     <a:bodyPr/>
@@ -9732,7 +9732,7 @@
                   </a:tcPr>
                 </a:tc>
               </a:tr>
-              <a:tr h="609600">
+              <a:tr h="590550">
                 <a:tc>
                   <a:txBody>
                     <a:bodyPr/>
@@ -10179,7 +10179,7 @@
           </p:nvPr>
         </p:nvGraphicFramePr>
         <p:xfrm>
-          <a:off x="1522476" y="2346960"/>
+          <a:off x="1522476" y="2385060"/>
           <a:ext cx="9144000" cy="914400"/>
         </p:xfrm>
         <a:graphic>
@@ -10191,7 +10191,7 @@
                 <a:gridCol w="2286000"/>
                 <a:gridCol w="2286000"/>
               </a:tblGrid>
-              <a:tr h="609600">
+              <a:tr h="590550">
                 <a:tc>
                   <a:txBody>
                     <a:bodyPr/>
@@ -10397,7 +10397,7 @@
                   </a:tcPr>
                 </a:tc>
               </a:tr>
-              <a:tr h="609600">
+              <a:tr h="590550">
                 <a:tc>
                   <a:txBody>
                     <a:bodyPr/>
@@ -10603,7 +10603,7 @@
                   </a:tcPr>
                 </a:tc>
               </a:tr>
-              <a:tr h="609600">
+              <a:tr h="590550">
                 <a:tc>
                   <a:txBody>
                     <a:bodyPr/>
@@ -10809,7 +10809,7 @@
                   </a:tcPr>
                 </a:tc>
               </a:tr>
-              <a:tr h="609600">
+              <a:tr h="590550">
                 <a:tc>
                   <a:txBody>
                     <a:bodyPr/>
@@ -11454,7 +11454,7 @@
           </p:nvPr>
         </p:nvGraphicFramePr>
         <p:xfrm>
-          <a:off x="608076" y="2810510"/>
+          <a:off x="608076" y="2828290"/>
           <a:ext cx="10972800" cy="914400"/>
         </p:xfrm>
         <a:graphic>
@@ -11472,7 +11472,7 @@
                 <a:gridCol w="1219200"/>
                 <a:gridCol w="1219200"/>
               </a:tblGrid>
-              <a:tr h="568960">
+              <a:tr h="551180">
                 <a:tc>
                   <a:txBody>
                     <a:bodyPr/>
@@ -12086,7 +12086,7 @@
                   </a:tcPr>
                 </a:tc>
               </a:tr>
-              <a:tr h="568960">
+              <a:tr h="551180">
                 <a:tc>
                   <a:txBody>
                     <a:bodyPr/>
@@ -12961,7 +12961,7 @@
           </p:nvPr>
         </p:nvGraphicFramePr>
         <p:xfrm>
-          <a:off x="1065276" y="2526030"/>
+          <a:off x="1065276" y="2552700"/>
           <a:ext cx="10058400" cy="914400"/>
         </p:xfrm>
         <a:graphic>
@@ -12975,7 +12975,7 @@
                 <a:gridCol w="1709928"/>
                 <a:gridCol w="1709928"/>
               </a:tblGrid>
-              <a:tr h="568960">
+              <a:tr h="551180">
                 <a:tc>
                   <a:txBody>
                     <a:bodyPr/>
@@ -13317,7 +13317,7 @@
                   </a:tcPr>
                 </a:tc>
               </a:tr>
-              <a:tr h="568960">
+              <a:tr h="551180">
                 <a:tc>
                   <a:txBody>
                     <a:bodyPr/>
@@ -13648,7 +13648,7 @@
                   </a:tcPr>
                 </a:tc>
               </a:tr>
-              <a:tr h="568960">
+              <a:tr h="551180">
                 <a:tc>
                   <a:txBody>
                     <a:bodyPr/>
@@ -15393,7 +15393,7 @@
           </p:nvPr>
         </p:nvGraphicFramePr>
         <p:xfrm>
-          <a:off x="1522476" y="2283714"/>
+          <a:off x="1522476" y="2310384"/>
           <a:ext cx="9144000" cy="914400"/>
         </p:xfrm>
         <a:graphic>
@@ -15410,7 +15410,7 @@
                 <a:gridCol w="1143000"/>
                 <a:gridCol w="1143000"/>
               </a:tblGrid>
-              <a:tr h="568960">
+              <a:tr h="551180">
                 <a:tc>
                   <a:txBody>
                     <a:bodyPr/>
@@ -15956,7 +15956,7 @@
                   </a:tcPr>
                 </a:tc>
               </a:tr>
-              <a:tr h="568960">
+              <a:tr h="551180">
                 <a:tc>
                   <a:txBody>
                     <a:bodyPr/>
@@ -16502,7 +16502,7 @@
                   </a:tcPr>
                 </a:tc>
               </a:tr>
-              <a:tr h="568960">
+              <a:tr h="551180">
                 <a:tc>
                   <a:txBody>
                     <a:bodyPr/>
